--- a/ppt/01.C언어-개론.pptx
+++ b/ppt/01.C언어-개론.pptx
@@ -1,6 +1,6 @@
 
 <file path=ppt/presentation.xml><?xml version="1.0" encoding="utf-8"?>
-<p:presentation xmlns:a="http://schemas.openxmlformats.org/drawingml/2006/main" xmlns:r="http://schemas.openxmlformats.org/officeDocument/2006/relationships" xmlns:p="http://schemas.openxmlformats.org/presentationml/2006/main" saveSubsetFonts="1">
+<p:presentation xmlns:a="http://schemas.openxmlformats.org/drawingml/2006/main" xmlns:r="http://schemas.openxmlformats.org/officeDocument/2006/relationships" xmlns:p="http://schemas.openxmlformats.org/presentationml/2006/main" embedTrueTypeFonts="1" saveSubsetFonts="1">
   <p:sldMasterIdLst>
     <p:sldMasterId id="2147483648" r:id="rId1"/>
   </p:sldMasterIdLst>
@@ -33,6 +33,23 @@
   </p:sldIdLst>
   <p:sldSz cx="9144000" cy="6858000" type="screen4x3"/>
   <p:notesSz cx="6858000" cy="9144000"/>
+  <p:embeddedFontLst>
+    <p:embeddedFont>
+      <p:font typeface="HY견고딕" panose="02030600000101010101" pitchFamily="18" charset="-127"/>
+      <p:regular r:id="rId25"/>
+    </p:embeddedFont>
+    <p:embeddedFont>
+      <p:font typeface="가을체" panose="02030600000101010101" pitchFamily="18" charset="-127"/>
+      <p:regular r:id="rId26"/>
+    </p:embeddedFont>
+    <p:embeddedFont>
+      <p:font typeface="Consolas" panose="020B0609020204030204" pitchFamily="49" charset="0"/>
+      <p:regular r:id="rId27"/>
+      <p:bold r:id="rId28"/>
+      <p:italic r:id="rId29"/>
+      <p:boldItalic r:id="rId30"/>
+    </p:embeddedFont>
+  </p:embeddedFontLst>
   <p:defaultTextStyle>
     <a:defPPr>
       <a:defRPr lang="ko-KR"/>

--- a/ppt/01.C언어-개론.pptx
+++ b/ppt/01.C언어-개론.pptx
@@ -35,12 +35,9 @@
   <p:notesSz cx="6858000" cy="9144000"/>
   <p:embeddedFontLst>
     <p:embeddedFont>
-      <p:font typeface="HY견고딕" panose="02030600000101010101" pitchFamily="18" charset="-127"/>
+      <p:font typeface="나눔바른고딕" panose="020B0603020101020101" pitchFamily="50" charset="-127"/>
       <p:regular r:id="rId25"/>
-    </p:embeddedFont>
-    <p:embeddedFont>
-      <p:font typeface="가을체" panose="02030600000101010101" pitchFamily="18" charset="-127"/>
-      <p:regular r:id="rId26"/>
+      <p:bold r:id="rId26"/>
     </p:embeddedFont>
     <p:embeddedFont>
       <p:font typeface="Consolas" panose="020B0609020204030204" pitchFamily="49" charset="0"/>
@@ -48,6 +45,14 @@
       <p:bold r:id="rId28"/>
       <p:italic r:id="rId29"/>
       <p:boldItalic r:id="rId30"/>
+    </p:embeddedFont>
+    <p:embeddedFont>
+      <p:font typeface="HY견고딕" panose="02030600000101010101" pitchFamily="18" charset="-127"/>
+      <p:regular r:id="rId31"/>
+    </p:embeddedFont>
+    <p:embeddedFont>
+      <p:font typeface="가을체" panose="02030600000101010101" pitchFamily="18" charset="-127"/>
+      <p:regular r:id="rId32"/>
     </p:embeddedFont>
   </p:embeddedFontLst>
   <p:defaultTextStyle>
@@ -1450,7 +1455,16 @@
         </p:spPr>
         <p:txBody>
           <a:bodyPr/>
-          <a:lstStyle/>
+          <a:lstStyle>
+            <a:lvl1pPr>
+              <a:buSzPct val="80000"/>
+              <a:defRPr/>
+            </a:lvl1pPr>
+            <a:lvl2pPr>
+              <a:buSzPct val="60000"/>
+              <a:defRPr/>
+            </a:lvl2pPr>
+          </a:lstStyle>
           <a:p>
             <a:pPr lvl="0"/>
             <a:r>
@@ -3915,14 +3929,13 @@
           <a:lstStyle/>
           <a:p>
             <a:r>
-              <a:rPr lang="en-US" altLang="ko-KR" b="0" dirty="0"/>
+              <a:rPr lang="en-US" altLang="ko-KR" dirty="0"/>
               <a:t>1.4 C++</a:t>
             </a:r>
             <a:r>
-              <a:rPr lang="ko-KR" altLang="en-US" b="0" dirty="0"/>
+              <a:rPr lang="ko-KR" altLang="en-US" dirty="0"/>
               <a:t>과의 관계</a:t>
             </a:r>
-            <a:endParaRPr lang="ko-KR" altLang="en-US" dirty="0"/>
           </a:p>
         </p:txBody>
       </p:sp>
@@ -4466,15 +4479,15 @@
           <a:lstStyle/>
           <a:p>
             <a:r>
-              <a:rPr lang="en-US" altLang="ko-KR" b="0" dirty="0"/>
+              <a:rPr lang="en-US" altLang="ko-KR" dirty="0"/>
               <a:t>1.5. </a:t>
             </a:r>
             <a:r>
-              <a:rPr lang="ko-KR" altLang="en-US" b="0" dirty="0"/>
+              <a:rPr lang="ko-KR" altLang="en-US" dirty="0"/>
               <a:t>컴파일러 설치</a:t>
             </a:r>
             <a:r>
-              <a:rPr lang="en-US" altLang="ko-KR" b="0" dirty="0"/>
+              <a:rPr lang="en-US" altLang="ko-KR" dirty="0"/>
               <a:t>: Visual Studio</a:t>
             </a:r>
             <a:endParaRPr lang="ko-KR" altLang="en-US" dirty="0"/>
@@ -4503,83 +4516,83 @@
           <a:lstStyle/>
           <a:p>
             <a:r>
-              <a:rPr lang="ko-KR" altLang="en-US" sz="2400" b="0" dirty="0"/>
+              <a:rPr lang="ko-KR" altLang="en-US" sz="2400" dirty="0"/>
               <a:t>최신 </a:t>
             </a:r>
             <a:r>
-              <a:rPr lang="en-US" altLang="ko-KR" sz="2400" b="0" dirty="0"/>
+              <a:rPr lang="en-US" altLang="ko-KR" sz="2400" dirty="0"/>
               <a:t>Visual Studio Community</a:t>
             </a:r>
           </a:p>
           <a:p>
             <a:pPr lvl="1"/>
             <a:r>
-              <a:rPr lang="en-US" altLang="ko-KR" sz="2000" b="0" u="sng" dirty="0">
+              <a:rPr lang="en-US" altLang="ko-KR" sz="2000" u="sng" dirty="0">
                 <a:hlinkClick r:id="rId2"/>
               </a:rPr>
               <a:t>https://visualstudio.microsoft.com/ko/free-developer-offers/</a:t>
             </a:r>
-            <a:endParaRPr lang="en-US" altLang="ko-KR" sz="2000" b="0" u="sng" dirty="0"/>
+            <a:endParaRPr lang="en-US" altLang="ko-KR" sz="2000" u="sng" dirty="0"/>
           </a:p>
           <a:p>
             <a:pPr lvl="1"/>
-            <a:endParaRPr lang="en-US" altLang="ko-KR" sz="2000" b="0" dirty="0"/>
-          </a:p>
-          <a:p>
-            <a:r>
-              <a:rPr lang="en-US" altLang="ko-KR" sz="2400" b="0" dirty="0"/>
+            <a:endParaRPr lang="en-US" altLang="ko-KR" sz="2000" dirty="0"/>
+          </a:p>
+          <a:p>
+            <a:r>
+              <a:rPr lang="en-US" altLang="ko-KR" sz="2400" dirty="0"/>
               <a:t>Visual Studio 2026 Community</a:t>
             </a:r>
           </a:p>
           <a:p>
             <a:pPr lvl="1"/>
             <a:r>
-              <a:rPr lang="en-US" altLang="ko-KR" sz="2000" b="0" u="sng" dirty="0">
+              <a:rPr lang="en-US" altLang="ko-KR" sz="2000" u="sng" dirty="0">
                 <a:hlinkClick r:id="rId3"/>
               </a:rPr>
               <a:t>https://aka.ms/vs/18/Stable/vs_community.exe</a:t>
             </a:r>
-            <a:endParaRPr lang="en-US" altLang="ko-KR" sz="2000" b="0" u="sng" dirty="0"/>
+            <a:endParaRPr lang="en-US" altLang="ko-KR" sz="2000" u="sng" dirty="0"/>
           </a:p>
           <a:p>
             <a:pPr lvl="1"/>
-            <a:endParaRPr lang="en-US" altLang="ko-KR" sz="2000" b="0" dirty="0"/>
-          </a:p>
-          <a:p>
-            <a:r>
-              <a:rPr lang="en-US" altLang="ko-KR" sz="2400" b="0" dirty="0"/>
+            <a:endParaRPr lang="en-US" altLang="ko-KR" sz="2000" dirty="0"/>
+          </a:p>
+          <a:p>
+            <a:r>
+              <a:rPr lang="en-US" altLang="ko-KR" sz="2400" dirty="0"/>
               <a:t>Visual Studio 2022 Community</a:t>
             </a:r>
           </a:p>
           <a:p>
             <a:pPr lvl="1"/>
             <a:r>
-              <a:rPr lang="en-US" altLang="ko-KR" sz="2000" b="0" u="sng" dirty="0">
+              <a:rPr lang="en-US" altLang="ko-KR" sz="2000" u="sng" dirty="0">
                 <a:hlinkClick r:id="rId4"/>
               </a:rPr>
               <a:t>https://aka.ms/vs/17/release/vs_community.exe</a:t>
             </a:r>
-            <a:endParaRPr lang="en-US" altLang="ko-KR" sz="2000" b="0" u="sng" dirty="0"/>
+            <a:endParaRPr lang="en-US" altLang="ko-KR" sz="2000" u="sng" dirty="0"/>
           </a:p>
           <a:p>
             <a:pPr lvl="1"/>
-            <a:endParaRPr lang="en-US" altLang="ko-KR" sz="2000" b="0" dirty="0"/>
-          </a:p>
-          <a:p>
-            <a:r>
-              <a:rPr lang="en-US" altLang="ko-KR" sz="2400" b="0" dirty="0"/>
+            <a:endParaRPr lang="en-US" altLang="ko-KR" sz="2000" dirty="0"/>
+          </a:p>
+          <a:p>
+            <a:r>
+              <a:rPr lang="en-US" altLang="ko-KR" sz="2400" dirty="0"/>
               <a:t>Visual Studio 2019 Community</a:t>
             </a:r>
           </a:p>
           <a:p>
             <a:pPr lvl="1"/>
             <a:r>
-              <a:rPr lang="en-US" altLang="ko-KR" sz="2000" b="0" u="sng" dirty="0">
+              <a:rPr lang="en-US" altLang="ko-KR" sz="2000" u="sng" dirty="0">
                 <a:hlinkClick r:id="rId5"/>
               </a:rPr>
               <a:t>https://aka.ms/vs/16/release/vs_community.exe</a:t>
             </a:r>
-            <a:endParaRPr lang="en-US" altLang="ko-KR" sz="2000" b="0" dirty="0"/>
+            <a:endParaRPr lang="en-US" altLang="ko-KR" sz="2000" dirty="0"/>
           </a:p>
           <a:p>
             <a:endParaRPr lang="ko-KR" altLang="en-US" dirty="0"/>
@@ -4669,14 +4682,13 @@
           <a:lstStyle/>
           <a:p>
             <a:r>
-              <a:rPr lang="en-US" altLang="ko-KR" b="0" dirty="0"/>
+              <a:rPr lang="en-US" altLang="ko-KR" dirty="0"/>
               <a:t>1.5.1 </a:t>
             </a:r>
             <a:r>
-              <a:rPr lang="ko-KR" altLang="en-US" b="0" dirty="0"/>
+              <a:rPr lang="ko-KR" altLang="en-US" dirty="0"/>
               <a:t>컴파일러 설치</a:t>
             </a:r>
-            <a:endParaRPr lang="ko-KR" altLang="en-US" dirty="0"/>
           </a:p>
         </p:txBody>
       </p:sp>
@@ -4889,14 +4901,13 @@
           <a:lstStyle/>
           <a:p>
             <a:r>
-              <a:rPr lang="en-US" altLang="ko-KR" b="0" dirty="0"/>
+              <a:rPr lang="en-US" altLang="ko-KR" dirty="0"/>
               <a:t>1.5.1 </a:t>
             </a:r>
             <a:r>
-              <a:rPr lang="ko-KR" altLang="en-US" b="0" dirty="0"/>
+              <a:rPr lang="ko-KR" altLang="en-US" dirty="0"/>
               <a:t>컴파일러 설치</a:t>
             </a:r>
-            <a:endParaRPr lang="ko-KR" altLang="en-US" dirty="0"/>
           </a:p>
         </p:txBody>
       </p:sp>
@@ -5077,14 +5088,13 @@
           <a:lstStyle/>
           <a:p>
             <a:r>
-              <a:rPr lang="en-US" altLang="ko-KR" b="0" dirty="0"/>
+              <a:rPr lang="en-US" altLang="ko-KR" dirty="0"/>
               <a:t>1.5.2 Hello world </a:t>
             </a:r>
             <a:r>
-              <a:rPr lang="ko-KR" altLang="en-US" b="0" dirty="0"/>
+              <a:rPr lang="ko-KR" altLang="en-US" dirty="0"/>
               <a:t>출력</a:t>
             </a:r>
-            <a:endParaRPr lang="ko-KR" altLang="en-US" dirty="0"/>
           </a:p>
         </p:txBody>
       </p:sp>
@@ -5110,39 +5120,39 @@
           <a:lstStyle/>
           <a:p>
             <a:r>
-              <a:rPr lang="ko-KR" altLang="en-US" b="0" dirty="0"/>
+              <a:rPr lang="ko-KR" altLang="en-US" dirty="0"/>
               <a:t>프로젝트 생성</a:t>
             </a:r>
-            <a:endParaRPr lang="en-US" altLang="ko-KR" b="0" dirty="0"/>
+            <a:endParaRPr lang="en-US" altLang="ko-KR" dirty="0"/>
           </a:p>
           <a:p>
             <a:pPr lvl="1"/>
             <a:r>
-              <a:rPr lang="en-US" altLang="ko-KR" b="0" dirty="0"/>
+              <a:rPr lang="en-US" altLang="ko-KR" dirty="0"/>
               <a:t>[</a:t>
             </a:r>
             <a:r>
-              <a:rPr lang="ko-KR" altLang="en-US" b="0" dirty="0"/>
+              <a:rPr lang="ko-KR" altLang="en-US" dirty="0"/>
               <a:t>메뉴</a:t>
             </a:r>
             <a:r>
-              <a:rPr lang="en-US" altLang="ko-KR" b="0" dirty="0"/>
+              <a:rPr lang="en-US" altLang="ko-KR" dirty="0"/>
               <a:t>] → [</a:t>
             </a:r>
             <a:r>
-              <a:rPr lang="ko-KR" altLang="en-US" b="0" dirty="0"/>
+              <a:rPr lang="ko-KR" altLang="en-US" dirty="0"/>
               <a:t>새로 만들기</a:t>
             </a:r>
             <a:r>
-              <a:rPr lang="en-US" altLang="ko-KR" b="0" dirty="0"/>
+              <a:rPr lang="en-US" altLang="ko-KR" dirty="0"/>
               <a:t>] → [</a:t>
             </a:r>
             <a:r>
-              <a:rPr lang="ko-KR" altLang="en-US" b="0" dirty="0"/>
+              <a:rPr lang="ko-KR" altLang="en-US" dirty="0"/>
               <a:t>프로젝트</a:t>
             </a:r>
             <a:r>
-              <a:rPr lang="en-US" altLang="ko-KR" b="0" dirty="0"/>
+              <a:rPr lang="en-US" altLang="ko-KR" dirty="0"/>
               <a:t>]</a:t>
             </a:r>
             <a:endParaRPr lang="ko-KR" altLang="en-US" dirty="0"/>
@@ -5342,14 +5352,13 @@
           <a:lstStyle/>
           <a:p>
             <a:r>
-              <a:rPr lang="en-US" altLang="ko-KR" b="0" dirty="0"/>
+              <a:rPr lang="en-US" altLang="ko-KR" dirty="0"/>
               <a:t>1.5.2 Hello world </a:t>
             </a:r>
             <a:r>
-              <a:rPr lang="ko-KR" altLang="en-US" b="0" dirty="0"/>
+              <a:rPr lang="ko-KR" altLang="en-US" dirty="0"/>
               <a:t>출력</a:t>
             </a:r>
-            <a:endParaRPr lang="ko-KR" altLang="en-US" dirty="0"/>
           </a:p>
         </p:txBody>
       </p:sp>
@@ -5521,14 +5530,13 @@
           <a:lstStyle/>
           <a:p>
             <a:r>
-              <a:rPr lang="en-US" altLang="ko-KR" b="0" dirty="0"/>
+              <a:rPr lang="en-US" altLang="ko-KR" dirty="0"/>
               <a:t>1.5.2 Hello world </a:t>
             </a:r>
             <a:r>
-              <a:rPr lang="ko-KR" altLang="en-US" b="0" dirty="0"/>
+              <a:rPr lang="ko-KR" altLang="en-US" dirty="0"/>
               <a:t>출력</a:t>
             </a:r>
-            <a:endParaRPr lang="ko-KR" altLang="en-US" dirty="0"/>
           </a:p>
         </p:txBody>
       </p:sp>
@@ -5554,30 +5562,30 @@
           <a:lstStyle/>
           <a:p>
             <a:r>
-              <a:rPr lang="ko-KR" altLang="en-US" b="0" dirty="0"/>
+              <a:rPr lang="ko-KR" altLang="en-US" dirty="0"/>
               <a:t>소스 파일 확장자 변경</a:t>
             </a:r>
             <a:r>
-              <a:rPr lang="en-US" altLang="ko-KR" b="0" dirty="0"/>
+              <a:rPr lang="en-US" altLang="ko-KR" dirty="0"/>
               <a:t>(.</a:t>
             </a:r>
             <a:r>
-              <a:rPr lang="en-US" altLang="ko-KR" b="0" dirty="0" err="1"/>
+              <a:rPr lang="en-US" altLang="ko-KR" dirty="0" err="1"/>
               <a:t>cpp</a:t>
             </a:r>
             <a:r>
-              <a:rPr lang="en-US" altLang="ko-KR" b="0" dirty="0"/>
+              <a:rPr lang="en-US" altLang="ko-KR" dirty="0"/>
               <a:t> → .c)</a:t>
             </a:r>
           </a:p>
           <a:p>
             <a:pPr lvl="1"/>
             <a:r>
-              <a:rPr lang="en-US" altLang="ko-KR" b="0" dirty="0"/>
+              <a:rPr lang="en-US" altLang="ko-KR" dirty="0"/>
               <a:t>F2 </a:t>
             </a:r>
             <a:r>
-              <a:rPr lang="ko-KR" altLang="en-US" b="0" dirty="0"/>
+              <a:rPr lang="ko-KR" altLang="en-US" dirty="0"/>
               <a:t>키 사용</a:t>
             </a:r>
           </a:p>
@@ -5851,14 +5859,13 @@
           <a:lstStyle/>
           <a:p>
             <a:r>
-              <a:rPr lang="en-US" altLang="ko-KR" b="0" dirty="0"/>
+              <a:rPr lang="en-US" altLang="ko-KR" dirty="0"/>
               <a:t>1.5.2 Hello world </a:t>
             </a:r>
             <a:r>
-              <a:rPr lang="ko-KR" altLang="en-US" b="0" dirty="0"/>
+              <a:rPr lang="ko-KR" altLang="en-US" dirty="0"/>
               <a:t>출력</a:t>
             </a:r>
-            <a:endParaRPr lang="ko-KR" altLang="en-US" dirty="0"/>
           </a:p>
         </p:txBody>
       </p:sp>
@@ -6033,14 +6040,13 @@
           <a:lstStyle/>
           <a:p>
             <a:r>
-              <a:rPr lang="en-US" altLang="ko-KR" b="0" dirty="0"/>
+              <a:rPr lang="en-US" altLang="ko-KR" dirty="0"/>
               <a:t>1.5.2 Hello world </a:t>
             </a:r>
             <a:r>
-              <a:rPr lang="ko-KR" altLang="en-US" b="0" dirty="0"/>
+              <a:rPr lang="ko-KR" altLang="en-US" dirty="0"/>
               <a:t>출력</a:t>
             </a:r>
-            <a:endParaRPr lang="ko-KR" altLang="en-US" dirty="0"/>
           </a:p>
         </p:txBody>
       </p:sp>
@@ -6542,14 +6548,13 @@
           <a:lstStyle/>
           <a:p>
             <a:r>
-              <a:rPr lang="en-US" altLang="ko-KR" b="0" dirty="0"/>
+              <a:rPr lang="en-US" altLang="ko-KR" dirty="0"/>
               <a:t>1.5.2 Hello world </a:t>
             </a:r>
             <a:r>
-              <a:rPr lang="ko-KR" altLang="en-US" b="0" dirty="0"/>
+              <a:rPr lang="ko-KR" altLang="en-US" dirty="0"/>
               <a:t>출력</a:t>
             </a:r>
-            <a:endParaRPr lang="ko-KR" altLang="en-US" dirty="0"/>
           </a:p>
         </p:txBody>
       </p:sp>
@@ -6575,31 +6580,31 @@
           <a:lstStyle/>
           <a:p>
             <a:r>
-              <a:rPr lang="ko-KR" altLang="en-US" b="0" dirty="0"/>
+              <a:rPr lang="ko-KR" altLang="en-US" dirty="0"/>
               <a:t>빌드</a:t>
             </a:r>
-            <a:endParaRPr lang="en-US" altLang="ko-KR" b="0" dirty="0"/>
-          </a:p>
-          <a:p>
-            <a:endParaRPr lang="en-US" altLang="ko-KR" b="0" dirty="0"/>
-          </a:p>
-          <a:p>
-            <a:endParaRPr lang="en-US" altLang="ko-KR" b="0" dirty="0"/>
-          </a:p>
-          <a:p>
-            <a:endParaRPr lang="en-US" altLang="ko-KR" b="0" dirty="0"/>
-          </a:p>
-          <a:p>
-            <a:endParaRPr lang="en-US" altLang="ko-KR" b="0" dirty="0"/>
-          </a:p>
-          <a:p>
-            <a:endParaRPr lang="en-US" altLang="ko-KR" b="0" dirty="0">
+            <a:endParaRPr lang="en-US" altLang="ko-KR" dirty="0"/>
+          </a:p>
+          <a:p>
+            <a:endParaRPr lang="en-US" altLang="ko-KR" dirty="0"/>
+          </a:p>
+          <a:p>
+            <a:endParaRPr lang="en-US" altLang="ko-KR" dirty="0"/>
+          </a:p>
+          <a:p>
+            <a:endParaRPr lang="en-US" altLang="ko-KR" dirty="0"/>
+          </a:p>
+          <a:p>
+            <a:endParaRPr lang="en-US" altLang="ko-KR" dirty="0"/>
+          </a:p>
+          <a:p>
+            <a:endParaRPr lang="en-US" altLang="ko-KR" dirty="0">
               <a:sym typeface="Wingdings" panose="05000000000000000000" pitchFamily="2" charset="2"/>
             </a:endParaRPr>
           </a:p>
           <a:p>
             <a:r>
-              <a:rPr lang="ko-KR" altLang="en-US" b="0" dirty="0">
+              <a:rPr lang="ko-KR" altLang="en-US" dirty="0">
                 <a:sym typeface="Wingdings" panose="05000000000000000000" pitchFamily="2" charset="2"/>
               </a:rPr>
               <a:t>실행</a:t>
@@ -7051,11 +7056,11 @@
           <a:p>
             <a:pPr eaLnBrk="1" hangingPunct="1"/>
             <a:r>
-              <a:rPr lang="en-US" altLang="ko-KR" b="0" dirty="0"/>
+              <a:rPr lang="en-US" altLang="ko-KR" dirty="0"/>
               <a:t>1.1 </a:t>
             </a:r>
             <a:r>
-              <a:rPr lang="ko-KR" altLang="en-US" b="0" dirty="0"/>
+              <a:rPr lang="ko-KR" altLang="en-US" dirty="0"/>
               <a:t>프로그래밍 언어의 종류</a:t>
             </a:r>
             <a:endParaRPr lang="ko-KR" altLang="en-US" sz="2400" dirty="0"/>
@@ -7090,56 +7095,55 @@
           <a:p>
             <a:pPr eaLnBrk="1" hangingPunct="1"/>
             <a:r>
-              <a:rPr lang="ko-KR" altLang="en-US" b="0" dirty="0"/>
+              <a:rPr lang="ko-KR" altLang="en-US" dirty="0"/>
               <a:t>프로그래밍이란</a:t>
             </a:r>
             <a:r>
-              <a:rPr lang="en-US" altLang="ko-KR" b="0" dirty="0"/>
+              <a:rPr lang="en-US" altLang="ko-KR" dirty="0"/>
               <a:t>?</a:t>
             </a:r>
           </a:p>
           <a:p>
             <a:pPr eaLnBrk="1" hangingPunct="1"/>
-            <a:endParaRPr lang="en-US" altLang="ko-KR" b="0" dirty="0"/>
+            <a:endParaRPr lang="en-US" altLang="ko-KR" dirty="0"/>
           </a:p>
           <a:p>
             <a:pPr lvl="1" eaLnBrk="1" hangingPunct="1"/>
             <a:r>
-              <a:rPr lang="ko-KR" altLang="en-US" b="0" dirty="0"/>
+              <a:rPr lang="ko-KR" altLang="en-US" dirty="0"/>
               <a:t>어떤 목적을 위해서 순서대로 작업을 작성하는 일</a:t>
             </a:r>
-            <a:endParaRPr lang="en-US" altLang="ko-KR" b="0" dirty="0"/>
+            <a:endParaRPr lang="en-US" altLang="ko-KR" dirty="0"/>
           </a:p>
           <a:p>
             <a:pPr eaLnBrk="1" hangingPunct="1"/>
-            <a:endParaRPr lang="en-US" altLang="ko-KR" b="0" dirty="0"/>
+            <a:endParaRPr lang="en-US" altLang="ko-KR" dirty="0"/>
           </a:p>
           <a:p>
             <a:pPr eaLnBrk="1" hangingPunct="1"/>
             <a:r>
-              <a:rPr lang="ko-KR" altLang="en-US" b="0" dirty="0"/>
+              <a:rPr lang="ko-KR" altLang="en-US" dirty="0"/>
               <a:t>컴퓨터 프로그래밍이란</a:t>
             </a:r>
             <a:r>
-              <a:rPr lang="en-US" altLang="ko-KR" b="0" dirty="0"/>
+              <a:rPr lang="en-US" altLang="ko-KR" dirty="0"/>
               <a:t>?</a:t>
             </a:r>
           </a:p>
           <a:p>
             <a:pPr lvl="1" eaLnBrk="1" hangingPunct="1"/>
             <a:r>
-              <a:rPr lang="ko-KR" altLang="en-US" b="0" dirty="0"/>
+              <a:rPr lang="ko-KR" altLang="en-US" dirty="0"/>
               <a:t>컴퓨터가 작업할 일을 규칙과 절차로 표현한 것</a:t>
             </a:r>
-            <a:endParaRPr lang="en-US" altLang="ko-KR" b="0" dirty="0"/>
+            <a:endParaRPr lang="en-US" altLang="ko-KR" dirty="0"/>
           </a:p>
           <a:p>
             <a:pPr lvl="1" eaLnBrk="1" hangingPunct="1"/>
             <a:r>
-              <a:rPr lang="ko-KR" altLang="en-US" b="0" dirty="0"/>
+              <a:rPr lang="ko-KR" altLang="en-US" dirty="0"/>
               <a:t>간단히 표현한다면 컴퓨터가 할 일을 순서대로 나열한 것</a:t>
             </a:r>
-            <a:endParaRPr lang="ko-KR" altLang="en-US" dirty="0"/>
           </a:p>
         </p:txBody>
       </p:sp>
@@ -7196,14 +7200,13 @@
           <a:lstStyle/>
           <a:p>
             <a:r>
-              <a:rPr lang="en-US" altLang="ko-KR" b="0" dirty="0"/>
+              <a:rPr lang="en-US" altLang="ko-KR" dirty="0"/>
               <a:t>1.5.2 Hello world </a:t>
             </a:r>
             <a:r>
-              <a:rPr lang="ko-KR" altLang="en-US" b="0" dirty="0"/>
+              <a:rPr lang="ko-KR" altLang="en-US" dirty="0"/>
               <a:t>출력</a:t>
             </a:r>
-            <a:endParaRPr lang="ko-KR" altLang="en-US" dirty="0"/>
           </a:p>
         </p:txBody>
       </p:sp>
@@ -7229,26 +7232,26 @@
           <a:lstStyle/>
           <a:p>
             <a:r>
-              <a:rPr lang="ko-KR" altLang="en-US" b="0" dirty="0"/>
+              <a:rPr lang="ko-KR" altLang="en-US" dirty="0"/>
               <a:t>실행 결과</a:t>
             </a:r>
-            <a:endParaRPr lang="en-US" altLang="ko-KR" b="0" dirty="0"/>
-          </a:p>
-          <a:p>
-            <a:endParaRPr lang="en-US" altLang="ko-KR" b="0" dirty="0"/>
-          </a:p>
-          <a:p>
-            <a:endParaRPr lang="en-US" altLang="ko-KR" b="0" dirty="0"/>
-          </a:p>
-          <a:p>
-            <a:endParaRPr lang="en-US" altLang="ko-KR" b="0" dirty="0"/>
-          </a:p>
-          <a:p>
-            <a:endParaRPr lang="en-US" altLang="ko-KR" b="0" dirty="0"/>
-          </a:p>
-          <a:p>
-            <a:r>
-              <a:rPr lang="ko-KR" altLang="en-US" b="0" dirty="0">
+            <a:endParaRPr lang="en-US" altLang="ko-KR" dirty="0"/>
+          </a:p>
+          <a:p>
+            <a:endParaRPr lang="en-US" altLang="ko-KR" dirty="0"/>
+          </a:p>
+          <a:p>
+            <a:endParaRPr lang="en-US" altLang="ko-KR" dirty="0"/>
+          </a:p>
+          <a:p>
+            <a:endParaRPr lang="en-US" altLang="ko-KR" dirty="0"/>
+          </a:p>
+          <a:p>
+            <a:endParaRPr lang="en-US" altLang="ko-KR" dirty="0"/>
+          </a:p>
+          <a:p>
+            <a:r>
+              <a:rPr lang="ko-KR" altLang="en-US" dirty="0">
                 <a:sym typeface="Wingdings" panose="05000000000000000000" pitchFamily="2" charset="2"/>
               </a:rPr>
               <a:t>실행 파일</a:t>
@@ -8035,11 +8038,11 @@
           <a:p>
             <a:pPr eaLnBrk="1" hangingPunct="1"/>
             <a:r>
-              <a:rPr lang="en-US" altLang="ko-KR" b="0" dirty="0"/>
+              <a:rPr lang="en-US" altLang="ko-KR" dirty="0"/>
               <a:t>1.1 </a:t>
             </a:r>
             <a:r>
-              <a:rPr lang="ko-KR" altLang="en-US" b="0" dirty="0"/>
+              <a:rPr lang="ko-KR" altLang="en-US" dirty="0"/>
               <a:t>프로그래밍 언어의 종류</a:t>
             </a:r>
             <a:endParaRPr lang="ko-KR" altLang="en-US" sz="2400" dirty="0"/>
@@ -8074,22 +8077,22 @@
           <a:p>
             <a:pPr eaLnBrk="1" hangingPunct="1"/>
             <a:r>
-              <a:rPr lang="ko-KR" altLang="en-US" b="0" dirty="0"/>
+              <a:rPr lang="ko-KR" altLang="en-US" dirty="0"/>
               <a:t>언어 수준</a:t>
             </a:r>
             <a:r>
-              <a:rPr lang="en-US" altLang="ko-KR" b="0" dirty="0"/>
+              <a:rPr lang="en-US" altLang="ko-KR" dirty="0"/>
               <a:t>(Level of Abstraction)</a:t>
             </a:r>
             <a:r>
-              <a:rPr lang="ko-KR" altLang="en-US" b="0" dirty="0"/>
+              <a:rPr lang="ko-KR" altLang="en-US" dirty="0"/>
               <a:t>에 따른 분류</a:t>
             </a:r>
-            <a:endParaRPr lang="en-US" altLang="ko-KR" b="0" dirty="0"/>
+            <a:endParaRPr lang="en-US" altLang="ko-KR" dirty="0"/>
           </a:p>
           <a:p>
             <a:pPr eaLnBrk="1" hangingPunct="1"/>
-            <a:endParaRPr lang="en-US" altLang="ko-KR" b="0" dirty="0"/>
+            <a:endParaRPr lang="en-US" altLang="ko-KR" dirty="0"/>
           </a:p>
           <a:p>
             <a:pPr lvl="1" eaLnBrk="1" hangingPunct="1"/>
@@ -8109,25 +8112,25 @@
           <a:p>
             <a:pPr lvl="2" eaLnBrk="1" hangingPunct="1"/>
             <a:r>
-              <a:rPr lang="ko-KR" altLang="en-US" b="0" dirty="0"/>
+              <a:rPr lang="ko-KR" altLang="en-US" dirty="0"/>
               <a:t>기계어</a:t>
             </a:r>
             <a:r>
-              <a:rPr lang="en-US" altLang="ko-KR" b="0" dirty="0"/>
+              <a:rPr lang="en-US" altLang="ko-KR" dirty="0"/>
               <a:t>(Machine Code), </a:t>
             </a:r>
             <a:r>
-              <a:rPr lang="ko-KR" altLang="en-US" b="0" dirty="0"/>
+              <a:rPr lang="ko-KR" altLang="en-US" dirty="0"/>
               <a:t>어셈블리 언어</a:t>
             </a:r>
             <a:r>
-              <a:rPr lang="en-US" altLang="ko-KR" b="0" dirty="0"/>
+              <a:rPr lang="en-US" altLang="ko-KR" dirty="0"/>
               <a:t>(Assembly Language)</a:t>
             </a:r>
           </a:p>
           <a:p>
             <a:pPr lvl="2" eaLnBrk="1" hangingPunct="1"/>
-            <a:endParaRPr lang="en-US" altLang="ko-KR" b="0" dirty="0"/>
+            <a:endParaRPr lang="en-US" altLang="ko-KR" dirty="0"/>
           </a:p>
           <a:p>
             <a:pPr lvl="1" eaLnBrk="1" hangingPunct="1"/>
@@ -8143,7 +8146,7 @@
           <a:p>
             <a:pPr lvl="2" eaLnBrk="1" hangingPunct="1"/>
             <a:r>
-              <a:rPr lang="en-US" altLang="ko-KR" b="0" dirty="0"/>
+              <a:rPr lang="en-US" altLang="ko-KR" dirty="0"/>
               <a:t>C, C++, Python, Java, C#, JavaScript</a:t>
             </a:r>
             <a:endParaRPr lang="en-US" altLang="ko-KR" sz="3200" dirty="0"/>
@@ -8464,11 +8467,11 @@
           <a:p>
             <a:pPr eaLnBrk="1" hangingPunct="1"/>
             <a:r>
-              <a:rPr lang="en-US" altLang="ko-KR" b="0" dirty="0"/>
+              <a:rPr lang="en-US" altLang="ko-KR" dirty="0"/>
               <a:t>1.1.2 </a:t>
             </a:r>
             <a:r>
-              <a:rPr lang="ko-KR" altLang="en-US" b="0" dirty="0"/>
+              <a:rPr lang="ko-KR" altLang="en-US" dirty="0"/>
               <a:t>소스 코드 실행 방식</a:t>
             </a:r>
             <a:endParaRPr lang="ko-KR" altLang="en-US" sz="2400" dirty="0"/>
@@ -8503,133 +8506,133 @@
           <a:p>
             <a:pPr eaLnBrk="1" hangingPunct="1"/>
             <a:r>
-              <a:rPr lang="ko-KR" altLang="en-US" b="0" dirty="0"/>
+              <a:rPr lang="ko-KR" altLang="en-US" dirty="0"/>
               <a:t>소스 코드 실행 방식</a:t>
             </a:r>
             <a:r>
-              <a:rPr lang="en-US" altLang="ko-KR" b="0" dirty="0"/>
+              <a:rPr lang="en-US" altLang="ko-KR" dirty="0"/>
               <a:t>(Execution Model)</a:t>
             </a:r>
             <a:r>
-              <a:rPr lang="ko-KR" altLang="en-US" b="0" dirty="0"/>
+              <a:rPr lang="ko-KR" altLang="en-US" dirty="0"/>
               <a:t>에 따른 분류</a:t>
             </a:r>
-            <a:endParaRPr lang="en-US" altLang="ko-KR" b="0" dirty="0"/>
+            <a:endParaRPr lang="en-US" altLang="ko-KR" dirty="0"/>
           </a:p>
           <a:p>
             <a:pPr eaLnBrk="1" hangingPunct="1"/>
-            <a:endParaRPr lang="en-US" altLang="ko-KR" b="0" dirty="0"/>
+            <a:endParaRPr lang="en-US" altLang="ko-KR" dirty="0"/>
           </a:p>
           <a:p>
             <a:pPr lvl="1" eaLnBrk="1" hangingPunct="1"/>
             <a:r>
-              <a:rPr lang="ko-KR" altLang="en-US" b="0" dirty="0"/>
+              <a:rPr lang="ko-KR" altLang="en-US" dirty="0"/>
               <a:t>어셈블리 언어 </a:t>
             </a:r>
             <a:r>
-              <a:rPr lang="en-US" altLang="ko-KR" b="0" dirty="0"/>
+              <a:rPr lang="en-US" altLang="ko-KR" dirty="0"/>
               <a:t>(Assembly Language)</a:t>
             </a:r>
           </a:p>
           <a:p>
             <a:pPr lvl="2" eaLnBrk="1" hangingPunct="1"/>
             <a:r>
-              <a:rPr lang="en-US" altLang="ko-KR" b="0" dirty="0"/>
+              <a:rPr lang="en-US" altLang="ko-KR" dirty="0"/>
               <a:t>X86 Assembly, ARM Assembly</a:t>
             </a:r>
           </a:p>
           <a:p>
             <a:pPr lvl="2" eaLnBrk="1" hangingPunct="1"/>
-            <a:endParaRPr lang="en-US" altLang="ko-KR" b="0" dirty="0"/>
+            <a:endParaRPr lang="en-US" altLang="ko-KR" dirty="0"/>
           </a:p>
           <a:p>
             <a:pPr lvl="1" eaLnBrk="1" hangingPunct="1"/>
             <a:r>
-              <a:rPr lang="ko-KR" altLang="en-US" b="0" dirty="0"/>
+              <a:rPr lang="ko-KR" altLang="en-US" dirty="0"/>
               <a:t>컴파일 언어 </a:t>
             </a:r>
             <a:r>
-              <a:rPr lang="en-US" altLang="ko-KR" b="0" dirty="0"/>
+              <a:rPr lang="en-US" altLang="ko-KR" dirty="0"/>
               <a:t>(Compiled Language)</a:t>
             </a:r>
           </a:p>
           <a:p>
             <a:pPr lvl="2" eaLnBrk="1" hangingPunct="1"/>
             <a:r>
-              <a:rPr lang="en-US" altLang="ko-KR" b="0" dirty="0"/>
+              <a:rPr lang="en-US" altLang="ko-KR" dirty="0"/>
               <a:t>C,</a:t>
             </a:r>
             <a:r>
-              <a:rPr lang="ko-KR" altLang="en-US" b="0" dirty="0"/>
+              <a:rPr lang="ko-KR" altLang="en-US" dirty="0"/>
               <a:t> </a:t>
             </a:r>
             <a:r>
-              <a:rPr lang="en-US" altLang="ko-KR" b="0" dirty="0"/>
+              <a:rPr lang="en-US" altLang="ko-KR" dirty="0"/>
               <a:t>C++,</a:t>
             </a:r>
             <a:r>
-              <a:rPr lang="ko-KR" altLang="en-US" b="0" dirty="0"/>
+              <a:rPr lang="ko-KR" altLang="en-US" dirty="0"/>
               <a:t> </a:t>
             </a:r>
             <a:r>
-              <a:rPr lang="en-US" altLang="ko-KR" b="0" dirty="0"/>
+              <a:rPr lang="en-US" altLang="ko-KR" dirty="0"/>
               <a:t>Rust,</a:t>
             </a:r>
             <a:r>
-              <a:rPr lang="ko-KR" altLang="en-US" b="0" dirty="0"/>
+              <a:rPr lang="ko-KR" altLang="en-US" dirty="0"/>
               <a:t> </a:t>
             </a:r>
             <a:r>
-              <a:rPr lang="en-US" altLang="ko-KR" b="0" dirty="0"/>
+              <a:rPr lang="en-US" altLang="ko-KR" dirty="0"/>
               <a:t>Go,</a:t>
             </a:r>
             <a:r>
-              <a:rPr lang="ko-KR" altLang="en-US" b="0" dirty="0"/>
+              <a:rPr lang="ko-KR" altLang="en-US" dirty="0"/>
               <a:t> </a:t>
             </a:r>
-            <a:endParaRPr lang="en-US" altLang="ko-KR" b="0" dirty="0"/>
+            <a:endParaRPr lang="en-US" altLang="ko-KR" dirty="0"/>
           </a:p>
           <a:p>
             <a:pPr lvl="2" eaLnBrk="1" hangingPunct="1"/>
-            <a:endParaRPr lang="en-US" altLang="ko-KR" b="0" dirty="0"/>
+            <a:endParaRPr lang="en-US" altLang="ko-KR" dirty="0"/>
           </a:p>
           <a:p>
             <a:pPr lvl="1" eaLnBrk="1" hangingPunct="1"/>
             <a:r>
-              <a:rPr lang="ko-KR" altLang="en-US" b="0" dirty="0"/>
+              <a:rPr lang="ko-KR" altLang="en-US" dirty="0"/>
               <a:t>인터프리터 언어 </a:t>
             </a:r>
             <a:r>
-              <a:rPr lang="en-US" altLang="ko-KR" b="0" dirty="0"/>
+              <a:rPr lang="en-US" altLang="ko-KR" dirty="0"/>
               <a:t>(Interpreted Language)</a:t>
             </a:r>
           </a:p>
           <a:p>
             <a:pPr lvl="2" eaLnBrk="1" hangingPunct="1"/>
             <a:r>
-              <a:rPr lang="en-US" altLang="ko-KR" b="0" dirty="0"/>
+              <a:rPr lang="en-US" altLang="ko-KR" dirty="0"/>
               <a:t>Python, Ruby, JavaScript</a:t>
             </a:r>
           </a:p>
           <a:p>
             <a:pPr lvl="2" eaLnBrk="1" hangingPunct="1"/>
-            <a:endParaRPr lang="en-US" altLang="ko-KR" b="0" dirty="0"/>
+            <a:endParaRPr lang="en-US" altLang="ko-KR" dirty="0"/>
           </a:p>
           <a:p>
             <a:pPr lvl="1" eaLnBrk="1" hangingPunct="1"/>
             <a:r>
-              <a:rPr lang="ko-KR" altLang="en-US" b="0" dirty="0"/>
+              <a:rPr lang="ko-KR" altLang="en-US" dirty="0"/>
               <a:t>가상 머신 기반 언어 </a:t>
             </a:r>
             <a:r>
-              <a:rPr lang="en-US" altLang="ko-KR" b="0" dirty="0"/>
+              <a:rPr lang="en-US" altLang="ko-KR" dirty="0"/>
               <a:t>(Virtual Machine Language)</a:t>
             </a:r>
           </a:p>
           <a:p>
             <a:pPr lvl="2" eaLnBrk="1" hangingPunct="1"/>
             <a:r>
-              <a:rPr lang="nl-NL" altLang="ko-KR" b="0" dirty="0"/>
+              <a:rPr lang="nl-NL" altLang="ko-KR" dirty="0"/>
               <a:t>Java(JVM), C#(.NET CLR)</a:t>
             </a:r>
             <a:endParaRPr lang="ko-KR" altLang="en-US" dirty="0"/>
@@ -8693,14 +8696,13 @@
           <a:lstStyle/>
           <a:p>
             <a:r>
-              <a:rPr lang="en-US" altLang="ko-KR" b="0" dirty="0"/>
+              <a:rPr lang="en-US" altLang="ko-KR" dirty="0"/>
               <a:t>1.1.3 C </a:t>
             </a:r>
             <a:r>
-              <a:rPr lang="ko-KR" altLang="en-US" b="0" dirty="0"/>
+              <a:rPr lang="ko-KR" altLang="en-US" dirty="0"/>
               <a:t>언어의 위치</a:t>
             </a:r>
-            <a:endParaRPr lang="ko-KR" altLang="en-US" dirty="0"/>
           </a:p>
         </p:txBody>
       </p:sp>
@@ -9080,14 +9082,13 @@
           <a:lstStyle/>
           <a:p>
             <a:r>
-              <a:rPr lang="en-US" altLang="ko-KR" b="0" dirty="0"/>
+              <a:rPr lang="en-US" altLang="ko-KR" dirty="0"/>
               <a:t>1.2 C </a:t>
             </a:r>
             <a:r>
-              <a:rPr lang="ko-KR" altLang="en-US" b="0" dirty="0"/>
+              <a:rPr lang="ko-KR" altLang="en-US" dirty="0"/>
               <a:t>언어 탄생과 배경</a:t>
             </a:r>
-            <a:endParaRPr lang="ko-KR" altLang="en-US" dirty="0"/>
           </a:p>
         </p:txBody>
       </p:sp>
@@ -9113,153 +9114,153 @@
           <a:lstStyle/>
           <a:p>
             <a:r>
-              <a:rPr lang="en-US" altLang="ko-KR" sz="2400" b="0" dirty="0"/>
+              <a:rPr lang="en-US" altLang="ko-KR" sz="2400" dirty="0"/>
               <a:t> ALGOL 60(Algorithmic Language 1960)</a:t>
             </a:r>
           </a:p>
           <a:p>
             <a:pPr lvl="1"/>
             <a:r>
-              <a:rPr lang="ko-KR" altLang="en-US" sz="2000" b="0" dirty="0"/>
+              <a:rPr lang="ko-KR" altLang="en-US" sz="2000" dirty="0"/>
               <a:t>알고리즘 표현을 위해 설계된 언어</a:t>
             </a:r>
-            <a:endParaRPr lang="en-US" altLang="ko-KR" sz="2000" b="0" dirty="0"/>
+            <a:endParaRPr lang="en-US" altLang="ko-KR" sz="2000" dirty="0"/>
           </a:p>
           <a:p>
             <a:pPr lvl="1"/>
-            <a:endParaRPr lang="en-US" altLang="ko-KR" sz="2000" b="0" dirty="0"/>
-          </a:p>
-          <a:p>
-            <a:r>
-              <a:rPr lang="en-US" altLang="ko-KR" sz="2400" b="0" dirty="0"/>
+            <a:endParaRPr lang="en-US" altLang="ko-KR" sz="2000" dirty="0"/>
+          </a:p>
+          <a:p>
+            <a:r>
+              <a:rPr lang="en-US" altLang="ko-KR" sz="2400" dirty="0"/>
               <a:t>CPL (Combined Programming Language 1963)</a:t>
             </a:r>
           </a:p>
           <a:p>
             <a:pPr lvl="1"/>
             <a:r>
-              <a:rPr lang="en-US" altLang="ko-KR" sz="2000" b="0" dirty="0"/>
+              <a:rPr lang="en-US" altLang="ko-KR" sz="2000" dirty="0"/>
               <a:t>ALGOL 60</a:t>
             </a:r>
             <a:r>
-              <a:rPr lang="ko-KR" altLang="en-US" sz="2000" b="0" dirty="0"/>
+              <a:rPr lang="ko-KR" altLang="en-US" sz="2000" dirty="0"/>
               <a:t>을 확장하여 범용 프로그래밍 언어로 설계</a:t>
             </a:r>
-            <a:endParaRPr lang="en-US" altLang="ko-KR" sz="2000" b="0" dirty="0"/>
+            <a:endParaRPr lang="en-US" altLang="ko-KR" sz="2000" dirty="0"/>
           </a:p>
           <a:p>
             <a:pPr lvl="1"/>
-            <a:endParaRPr lang="en-US" altLang="ko-KR" sz="2000" b="0" dirty="0"/>
-          </a:p>
-          <a:p>
-            <a:r>
-              <a:rPr lang="en-US" altLang="ko-KR" sz="2400" b="0" dirty="0"/>
+            <a:endParaRPr lang="en-US" altLang="ko-KR" sz="2000" dirty="0"/>
+          </a:p>
+          <a:p>
+            <a:r>
+              <a:rPr lang="en-US" altLang="ko-KR" sz="2400" dirty="0"/>
               <a:t>BCPL (Basic CPL: 1966)</a:t>
             </a:r>
           </a:p>
           <a:p>
             <a:pPr lvl="1"/>
             <a:r>
-              <a:rPr lang="en-US" altLang="ko-KR" sz="2000" b="0" dirty="0"/>
+              <a:rPr lang="en-US" altLang="ko-KR" sz="2000" dirty="0"/>
               <a:t>CPL</a:t>
             </a:r>
             <a:r>
-              <a:rPr lang="ko-KR" altLang="en-US" sz="2000" b="0" dirty="0"/>
+              <a:rPr lang="ko-KR" altLang="en-US" sz="2000" dirty="0"/>
               <a:t>의 복잡성을 단순화</a:t>
             </a:r>
-            <a:endParaRPr lang="en-US" altLang="ko-KR" sz="2000" b="0" dirty="0"/>
+            <a:endParaRPr lang="en-US" altLang="ko-KR" sz="2000" dirty="0"/>
           </a:p>
           <a:p>
             <a:pPr lvl="1"/>
-            <a:endParaRPr lang="en-US" altLang="ko-KR" sz="2000" b="0" dirty="0"/>
-          </a:p>
-          <a:p>
-            <a:r>
-              <a:rPr lang="en-US" altLang="ko-KR" sz="2400" b="0" dirty="0"/>
+            <a:endParaRPr lang="en-US" altLang="ko-KR" sz="2000" dirty="0"/>
+          </a:p>
+          <a:p>
+            <a:r>
+              <a:rPr lang="en-US" altLang="ko-KR" sz="2400" dirty="0"/>
               <a:t>B </a:t>
             </a:r>
             <a:r>
-              <a:rPr lang="ko-KR" altLang="en-US" sz="2400" b="0" dirty="0"/>
+              <a:rPr lang="ko-KR" altLang="en-US" sz="2400" dirty="0"/>
               <a:t>언어 </a:t>
             </a:r>
             <a:r>
-              <a:rPr lang="en-US" altLang="ko-KR" sz="2400" b="0" dirty="0"/>
+              <a:rPr lang="en-US" altLang="ko-KR" sz="2400" dirty="0"/>
               <a:t>(1969: </a:t>
             </a:r>
             <a:r>
-              <a:rPr lang="ko-KR" altLang="en-US" sz="2400" b="0" dirty="0"/>
+              <a:rPr lang="ko-KR" altLang="en-US" sz="2400" dirty="0"/>
               <a:t>켄 톰슨</a:t>
             </a:r>
             <a:r>
-              <a:rPr lang="en-US" altLang="ko-KR" sz="2400" b="0" dirty="0"/>
+              <a:rPr lang="en-US" altLang="ko-KR" sz="2400" dirty="0"/>
               <a:t>)</a:t>
             </a:r>
           </a:p>
           <a:p>
             <a:pPr lvl="1"/>
             <a:r>
-              <a:rPr lang="en-US" altLang="ko-KR" sz="2000" b="0" dirty="0"/>
+              <a:rPr lang="en-US" altLang="ko-KR" sz="2000" dirty="0"/>
               <a:t>BCPL </a:t>
             </a:r>
             <a:r>
-              <a:rPr lang="ko-KR" altLang="en-US" sz="2000" b="0" dirty="0"/>
+              <a:rPr lang="ko-KR" altLang="en-US" sz="2000" dirty="0"/>
               <a:t>기반 초기 </a:t>
             </a:r>
             <a:r>
-              <a:rPr lang="en-US" altLang="ko-KR" sz="2000" b="0" dirty="0"/>
+              <a:rPr lang="en-US" altLang="ko-KR" sz="2000" dirty="0"/>
               <a:t>UNIX</a:t>
             </a:r>
             <a:r>
-              <a:rPr lang="ko-KR" altLang="en-US" sz="2000" b="0" dirty="0"/>
+              <a:rPr lang="ko-KR" altLang="en-US" sz="2000" dirty="0"/>
               <a:t> 운영체제 구현</a:t>
             </a:r>
-            <a:endParaRPr lang="en-US" altLang="ko-KR" sz="2000" b="0" dirty="0"/>
+            <a:endParaRPr lang="en-US" altLang="ko-KR" sz="2000" dirty="0"/>
           </a:p>
           <a:p>
             <a:pPr lvl="1"/>
-            <a:endParaRPr lang="en-US" altLang="ko-KR" sz="2000" b="0" dirty="0"/>
-          </a:p>
-          <a:p>
-            <a:r>
-              <a:rPr lang="en-US" altLang="ko-KR" sz="2400" b="0" dirty="0"/>
+            <a:endParaRPr lang="en-US" altLang="ko-KR" sz="2000" dirty="0"/>
+          </a:p>
+          <a:p>
+            <a:r>
+              <a:rPr lang="en-US" altLang="ko-KR" sz="2400" dirty="0"/>
               <a:t>C </a:t>
             </a:r>
             <a:r>
-              <a:rPr lang="ko-KR" altLang="en-US" sz="2400" b="0" dirty="0"/>
+              <a:rPr lang="ko-KR" altLang="en-US" sz="2400" dirty="0"/>
               <a:t>언어 </a:t>
             </a:r>
             <a:r>
-              <a:rPr lang="en-US" altLang="ko-KR" sz="2400" b="0" dirty="0"/>
+              <a:rPr lang="en-US" altLang="ko-KR" sz="2400" dirty="0"/>
               <a:t>(1972: </a:t>
             </a:r>
             <a:r>
-              <a:rPr lang="ko-KR" altLang="en-US" sz="2400" b="0" dirty="0"/>
+              <a:rPr lang="ko-KR" altLang="en-US" sz="2400" dirty="0"/>
               <a:t>데니스 리치</a:t>
             </a:r>
             <a:r>
-              <a:rPr lang="en-US" altLang="ko-KR" sz="2400" b="0" dirty="0"/>
+              <a:rPr lang="en-US" altLang="ko-KR" sz="2400" dirty="0"/>
               <a:t>)</a:t>
             </a:r>
           </a:p>
           <a:p>
             <a:pPr lvl="1"/>
             <a:r>
-              <a:rPr lang="en-US" altLang="ko-KR" sz="2000" b="0" dirty="0"/>
+              <a:rPr lang="en-US" altLang="ko-KR" sz="2000" dirty="0"/>
               <a:t>B </a:t>
             </a:r>
             <a:r>
-              <a:rPr lang="ko-KR" altLang="en-US" sz="2000" b="0" dirty="0"/>
+              <a:rPr lang="ko-KR" altLang="en-US" sz="2000" dirty="0"/>
               <a:t>언어를 개선하여 개발</a:t>
             </a:r>
             <a:br>
-              <a:rPr lang="ko-KR" altLang="en-US" sz="2000" b="0" dirty="0"/>
+              <a:rPr lang="ko-KR" altLang="en-US" sz="2000" dirty="0"/>
             </a:br>
             <a:r>
-              <a:rPr lang="en-US" altLang="ko-KR" sz="2000" b="0" dirty="0"/>
+              <a:rPr lang="en-US" altLang="ko-KR" sz="2000" dirty="0"/>
               <a:t>UNIX </a:t>
             </a:r>
             <a:r>
-              <a:rPr lang="ko-KR" altLang="en-US" sz="2000" b="0" dirty="0"/>
+              <a:rPr lang="ko-KR" altLang="en-US" sz="2000" dirty="0"/>
               <a:t>운영체제 구현에 사용</a:t>
             </a:r>
           </a:p>
@@ -9348,7 +9349,7 @@
           <a:lstStyle/>
           <a:p>
             <a:r>
-              <a:rPr lang="en-US" altLang="ko-KR" b="0" dirty="0"/>
+              <a:rPr lang="en-US" altLang="ko-KR" dirty="0"/>
               <a:t>1.2.2 </a:t>
             </a:r>
             <a:r>
@@ -9695,14 +9696,13 @@
           <a:lstStyle/>
           <a:p>
             <a:r>
-              <a:rPr lang="en-US" altLang="ko-KR" b="0" dirty="0"/>
+              <a:rPr lang="en-US" altLang="ko-KR" dirty="0"/>
               <a:t>1.3 C </a:t>
             </a:r>
             <a:r>
-              <a:rPr lang="ko-KR" altLang="en-US" b="0" dirty="0"/>
+              <a:rPr lang="ko-KR" altLang="en-US" dirty="0"/>
               <a:t>언어의 특징과 장점</a:t>
             </a:r>
-            <a:endParaRPr lang="ko-KR" altLang="en-US" dirty="0"/>
           </a:p>
         </p:txBody>
       </p:sp>
@@ -9728,86 +9728,85 @@
           <a:lstStyle/>
           <a:p>
             <a:r>
-              <a:rPr lang="ko-KR" altLang="en-US" b="0" dirty="0"/>
+              <a:rPr lang="ko-KR" altLang="en-US" dirty="0"/>
               <a:t>간결하고 직관적인 문법</a:t>
             </a:r>
-            <a:endParaRPr lang="en-US" altLang="ko-KR" b="0" dirty="0"/>
+            <a:endParaRPr lang="en-US" altLang="ko-KR" dirty="0"/>
           </a:p>
           <a:p>
             <a:pPr marL="0" indent="0">
               <a:buNone/>
             </a:pPr>
             <a:r>
-              <a:rPr lang="ko-KR" altLang="en-US" b="0" dirty="0"/>
+              <a:rPr lang="ko-KR" altLang="en-US" dirty="0"/>
               <a:t> </a:t>
             </a:r>
-            <a:endParaRPr lang="en-US" altLang="ko-KR" b="0" dirty="0"/>
-          </a:p>
-          <a:p>
-            <a:r>
-              <a:rPr lang="ko-KR" altLang="en-US" b="0" dirty="0"/>
+            <a:endParaRPr lang="en-US" altLang="ko-KR" dirty="0"/>
+          </a:p>
+          <a:p>
+            <a:r>
+              <a:rPr lang="ko-KR" altLang="en-US" dirty="0"/>
               <a:t>뛰어난 </a:t>
             </a:r>
             <a:r>
-              <a:rPr lang="ko-KR" altLang="en-US" b="0" dirty="0" err="1"/>
+              <a:rPr lang="ko-KR" altLang="en-US" dirty="0" err="1"/>
               <a:t>이식성</a:t>
             </a:r>
             <a:r>
-              <a:rPr lang="en-US" altLang="ko-KR" b="0" dirty="0"/>
+              <a:rPr lang="en-US" altLang="ko-KR" dirty="0"/>
               <a:t>(Portability)</a:t>
             </a:r>
           </a:p>
           <a:p>
-            <a:endParaRPr lang="en-US" altLang="ko-KR" b="0" dirty="0"/>
-          </a:p>
-          <a:p>
-            <a:r>
-              <a:rPr lang="ko-KR" altLang="en-US" b="0" dirty="0"/>
+            <a:endParaRPr lang="en-US" altLang="ko-KR" dirty="0"/>
+          </a:p>
+          <a:p>
+            <a:r>
+              <a:rPr lang="ko-KR" altLang="en-US" dirty="0"/>
               <a:t>고수준</a:t>
             </a:r>
             <a:r>
-              <a:rPr lang="en-US" altLang="ko-KR" b="0" dirty="0"/>
+              <a:rPr lang="en-US" altLang="ko-KR" dirty="0"/>
               <a:t>·</a:t>
             </a:r>
             <a:r>
-              <a:rPr lang="ko-KR" altLang="en-US" b="0" dirty="0" err="1"/>
+              <a:rPr lang="ko-KR" altLang="en-US" dirty="0" err="1"/>
               <a:t>저수준</a:t>
             </a:r>
             <a:r>
-              <a:rPr lang="ko-KR" altLang="en-US" b="0" dirty="0"/>
+              <a:rPr lang="ko-KR" altLang="en-US" dirty="0"/>
               <a:t> 기능의 균형</a:t>
             </a:r>
-            <a:endParaRPr lang="en-US" altLang="ko-KR" b="0" dirty="0"/>
-          </a:p>
-          <a:p>
-            <a:endParaRPr lang="en-US" altLang="ko-KR" b="0" dirty="0"/>
-          </a:p>
-          <a:p>
-            <a:r>
-              <a:rPr lang="ko-KR" altLang="en-US" b="0" dirty="0"/>
+            <a:endParaRPr lang="en-US" altLang="ko-KR" dirty="0"/>
+          </a:p>
+          <a:p>
+            <a:endParaRPr lang="en-US" altLang="ko-KR" dirty="0"/>
+          </a:p>
+          <a:p>
+            <a:r>
+              <a:rPr lang="ko-KR" altLang="en-US" dirty="0"/>
               <a:t>시스템 개발 언어</a:t>
             </a:r>
-            <a:endParaRPr lang="en-US" altLang="ko-KR" b="0" dirty="0"/>
-          </a:p>
-          <a:p>
-            <a:endParaRPr lang="en-US" altLang="ko-KR" b="0" dirty="0"/>
-          </a:p>
-          <a:p>
-            <a:r>
-              <a:rPr lang="ko-KR" altLang="en-US" b="0" dirty="0"/>
+            <a:endParaRPr lang="en-US" altLang="ko-KR" dirty="0"/>
+          </a:p>
+          <a:p>
+            <a:endParaRPr lang="en-US" altLang="ko-KR" dirty="0"/>
+          </a:p>
+          <a:p>
+            <a:r>
+              <a:rPr lang="ko-KR" altLang="en-US" dirty="0"/>
               <a:t>작은 런타임과 높은 성능</a:t>
             </a:r>
-            <a:endParaRPr lang="en-US" altLang="ko-KR" b="0" dirty="0"/>
-          </a:p>
-          <a:p>
-            <a:endParaRPr lang="en-US" altLang="ko-KR" b="0" dirty="0"/>
-          </a:p>
-          <a:p>
-            <a:r>
-              <a:rPr lang="ko-KR" altLang="en-US" b="0" dirty="0"/>
+            <a:endParaRPr lang="en-US" altLang="ko-KR" dirty="0"/>
+          </a:p>
+          <a:p>
+            <a:endParaRPr lang="en-US" altLang="ko-KR" dirty="0"/>
+          </a:p>
+          <a:p>
+            <a:r>
+              <a:rPr lang="ko-KR" altLang="en-US" dirty="0"/>
               <a:t>명확한 메모리 모델</a:t>
             </a:r>
-            <a:endParaRPr lang="ko-KR" altLang="en-US" dirty="0"/>
           </a:p>
         </p:txBody>
       </p:sp>
@@ -9900,14 +9899,13 @@
           <a:lstStyle/>
           <a:p>
             <a:r>
-              <a:rPr lang="en-US" altLang="ko-KR" b="0" dirty="0"/>
+              <a:rPr lang="en-US" altLang="ko-KR" dirty="0"/>
               <a:t>1.3 C </a:t>
             </a:r>
             <a:r>
-              <a:rPr lang="ko-KR" altLang="en-US" b="0" dirty="0"/>
+              <a:rPr lang="ko-KR" altLang="en-US" dirty="0"/>
               <a:t>언어의 특징과 장점</a:t>
             </a:r>
-            <a:endParaRPr lang="ko-KR" altLang="en-US" dirty="0"/>
           </a:p>
         </p:txBody>
       </p:sp>
@@ -9933,69 +9931,68 @@
           <a:lstStyle/>
           <a:p>
             <a:r>
-              <a:rPr lang="ko-KR" altLang="en-US" b="0" dirty="0"/>
+              <a:rPr lang="ko-KR" altLang="en-US" dirty="0"/>
               <a:t>예측 가능한 컴파일 과정</a:t>
             </a:r>
-            <a:endParaRPr lang="en-US" altLang="ko-KR" b="0" dirty="0"/>
-          </a:p>
-          <a:p>
-            <a:endParaRPr lang="en-US" altLang="ko-KR" b="0" dirty="0"/>
-          </a:p>
-          <a:p>
-            <a:r>
-              <a:rPr lang="ko-KR" altLang="en-US" b="0" dirty="0"/>
+            <a:endParaRPr lang="en-US" altLang="ko-KR" dirty="0"/>
+          </a:p>
+          <a:p>
+            <a:endParaRPr lang="en-US" altLang="ko-KR" dirty="0"/>
+          </a:p>
+          <a:p>
+            <a:r>
+              <a:rPr lang="ko-KR" altLang="en-US" dirty="0"/>
               <a:t>국제 표준에 따른 안정적인 구조</a:t>
             </a:r>
-            <a:endParaRPr lang="en-US" altLang="ko-KR" b="0" dirty="0"/>
+            <a:endParaRPr lang="en-US" altLang="ko-KR" dirty="0"/>
           </a:p>
           <a:p>
             <a:pPr lvl="1"/>
             <a:r>
-              <a:rPr lang="en-US" altLang="ko-KR" b="0" dirty="0"/>
+              <a:rPr lang="en-US" altLang="ko-KR" dirty="0"/>
               <a:t>C89/C90 C99 C11 C17 C23</a:t>
             </a:r>
           </a:p>
           <a:p>
             <a:pPr lvl="1"/>
-            <a:endParaRPr lang="en-US" altLang="ko-KR" b="0" dirty="0"/>
-          </a:p>
-          <a:p>
-            <a:r>
-              <a:rPr lang="ko-KR" altLang="en-US" b="0" dirty="0"/>
+            <a:endParaRPr lang="en-US" altLang="ko-KR" dirty="0"/>
+          </a:p>
+          <a:p>
+            <a:r>
+              <a:rPr lang="ko-KR" altLang="en-US" dirty="0"/>
               <a:t>현대 언어와 시스템의 기반</a:t>
             </a:r>
-            <a:endParaRPr lang="en-US" altLang="ko-KR" b="0" dirty="0"/>
-          </a:p>
-          <a:p>
-            <a:endParaRPr lang="en-US" altLang="ko-KR" b="0" dirty="0"/>
-          </a:p>
-          <a:p>
-            <a:r>
-              <a:rPr lang="ko-KR" altLang="en-US" b="0" dirty="0"/>
+            <a:endParaRPr lang="en-US" altLang="ko-KR" dirty="0"/>
+          </a:p>
+          <a:p>
+            <a:endParaRPr lang="en-US" altLang="ko-KR" dirty="0"/>
+          </a:p>
+          <a:p>
+            <a:r>
+              <a:rPr lang="ko-KR" altLang="en-US" dirty="0"/>
               <a:t>방대한 기존 코드</a:t>
             </a:r>
             <a:r>
-              <a:rPr lang="en-US" altLang="ko-KR" b="0" dirty="0"/>
+              <a:rPr lang="en-US" altLang="ko-KR" dirty="0"/>
               <a:t>(</a:t>
             </a:r>
             <a:r>
-              <a:rPr lang="ko-KR" altLang="en-US" b="0" dirty="0"/>
+              <a:rPr lang="ko-KR" altLang="en-US" dirty="0"/>
               <a:t>레거시 시스템</a:t>
             </a:r>
             <a:r>
-              <a:rPr lang="en-US" altLang="ko-KR" b="0" dirty="0"/>
+              <a:rPr lang="en-US" altLang="ko-KR" dirty="0"/>
               <a:t>)</a:t>
             </a:r>
           </a:p>
           <a:p>
-            <a:endParaRPr lang="en-US" altLang="ko-KR" b="0" dirty="0"/>
-          </a:p>
-          <a:p>
-            <a:r>
-              <a:rPr lang="ko-KR" altLang="en-US" b="0" dirty="0"/>
+            <a:endParaRPr lang="en-US" altLang="ko-KR" dirty="0"/>
+          </a:p>
+          <a:p>
+            <a:r>
+              <a:rPr lang="ko-KR" altLang="en-US" dirty="0"/>
               <a:t>컴퓨터 과학 학습에 적합한 언어</a:t>
             </a:r>
-            <a:endParaRPr lang="ko-KR" altLang="en-US" dirty="0"/>
           </a:p>
         </p:txBody>
       </p:sp>
@@ -10084,15 +10081,15 @@
         <a:srgbClr val="B2B2B2"/>
       </a:folHlink>
     </a:clrScheme>
-    <a:fontScheme name="기본 디자인">
+    <a:fontScheme name="바른고딕">
       <a:majorFont>
-        <a:latin typeface="가을체"/>
-        <a:ea typeface="가을체"/>
+        <a:latin typeface="나눔바른고딕"/>
+        <a:ea typeface="나눔바른고딕"/>
         <a:cs typeface=""/>
       </a:majorFont>
       <a:minorFont>
-        <a:latin typeface="가을체"/>
-        <a:ea typeface="가을체"/>
+        <a:latin typeface="나눔바른고딕"/>
+        <a:ea typeface="나눔바른고딕"/>
         <a:cs typeface=""/>
       </a:minorFont>
     </a:fontScheme>
